--- a/docs/deck/SmartTraffic-SIH-PS90.pptx
+++ b/docs/deck/SmartTraffic-SIH-PS90.pptx
@@ -120,44 +120,44 @@
   <p:extLst>
     <p:ext uri="{521415D9-36F7-43E2-AB2F-B90AF26B5E84}">
       <p14:sectionLst xmlns:p14="http://schemas.microsoft.com/office/powerpoint/2010/main">
-        <p14:section name="Opening" id="{450e6223-e32e-c0fd-3cfc-a6af7aeca0cd}">
+        <p14:section name="Opening" id="{0057f988-90c6-0808-30bf-5afcb09d0582}">
           <p14:sldIdLst>
             <p14:sldId id="256"/>
           </p14:sldIdLst>
         </p14:section>
-        <p14:section name="Problem" id="{93871322-ec25-97de-aaf0-29d3e462f8d8}">
+        <p14:section name="Problem" id="{14f081f9-e4f6-cd8d-8c6d-246976a81885}">
           <p14:sldIdLst>
             <p14:sldId id="257"/>
             <p14:sldId id="258"/>
           </p14:sldIdLst>
         </p14:section>
-        <p14:section name="The novelty" id="{2e21a506-4f69-7b2a-e1b9-375eb99d400e}">
+        <p14:section name="The novelty" id="{bd1e0452-7945-f7ce-87da-f71be93c5dc6}">
           <p14:sldIdLst>
             <p14:sldId id="259"/>
             <p14:sldId id="260"/>
             <p14:sldId id="261"/>
           </p14:sldIdLst>
         </p14:section>
-        <p14:section name="Method" id="{59155ddf-f34f-ac97-f0ca-e5bf95cff53f}">
+        <p14:section name="Method" id="{af729c79-e790-5105-0cad-882f98f57853}">
           <p14:sldIdLst>
             <p14:sldId id="262"/>
           </p14:sldIdLst>
         </p14:section>
-        <p14:section name="Results" id="{26457fc1-9b3f-8038-624f-eea5f5d0f731}">
+        <p14:section name="Results" id="{37b72acf-2c96-f4cc-2421-be6139c5f48e}">
           <p14:sldIdLst>
             <p14:sldId id="263"/>
             <p14:sldId id="264"/>
             <p14:sldId id="265"/>
           </p14:sldIdLst>
         </p14:section>
-        <p14:section name="Deployability" id="{3baa5d67-4754-dab3-cf37-d8d32a3722d4}">
+        <p14:section name="Deployability" id="{4a5d0ecd-bd19-6103-6bb9-f939a1ced275}">
           <p14:sldIdLst>
             <p14:sldId id="266"/>
             <p14:sldId id="267"/>
             <p14:sldId id="268"/>
           </p14:sldIdLst>
         </p14:section>
-        <p14:section name="Close" id="{88714a02-13c3-5c03-70f7-d96e1c566c7b}">
+        <p14:section name="Close" id="{11176125-90bb-c869-766c-2d7476ca7e94}">
           <p14:sldIdLst>
             <p14:sldId id="269"/>
           </p14:sldIdLst>
@@ -4047,7 +4047,128 @@
       </p:sp>
       <p:sp>
         <p:nvSpPr>
-          <p:cNvPr id="4" name="signal housing"/>
+          <p:cNvPr id="4" name="team card"/>
+          <p:cNvSpPr/>
+          <p:nvPr/>
+        </p:nvSpPr>
+        <p:spPr>
+          <a:xfrm>
+            <a:off x="640080" y="5257800"/>
+            <a:ext cx="6035040" cy="1051560"/>
+          </a:xfrm>
+          <a:prstGeom prst="roundRect">
+            <a:avLst>
+              <a:gd name="adj" fmla="val 6957"/>
+            </a:avLst>
+          </a:prstGeom>
+          <a:solidFill>
+            <a:srgbClr val="1B2A3A"/>
+          </a:solidFill>
+          <a:ln w="12700">
+            <a:solidFill>
+              <a:srgbClr val="1B2A3A"/>
+            </a:solidFill>
+            <a:prstDash val="solid"/>
+          </a:ln>
+        </p:spPr>
+      </p:sp>
+      <p:sp>
+        <p:nvSpPr>
+          <p:cNvPr id="5" name="Text 3"/>
+          <p:cNvSpPr txBox="1"/>
+          <p:nvPr/>
+        </p:nvSpPr>
+        <p:spPr>
+          <a:xfrm>
+            <a:off x="960120" y="5394960"/>
+            <a:ext cx="5486400" cy="365760"/>
+          </a:xfrm>
+          <a:prstGeom prst="rect">
+            <a:avLst/>
+          </a:prstGeom>
+          <a:noFill/>
+          <a:ln/>
+        </p:spPr>
+        <p:txBody>
+          <a:bodyPr wrap="square" lIns="0" tIns="0" rIns="0" bIns="0" rtlCol="0" anchor="ctr"/>
+          <a:lstStyle/>
+          <a:p>
+            <a:pPr indent="0" marL="0">
+              <a:buNone/>
+            </a:pPr>
+            <a:r>
+              <a:rPr lang="en-US" sz="1500" b="1" dirty="0">
+                <a:solidFill>
+                  <a:srgbClr val="FFFFFF"/>
+                </a:solidFill>
+              </a:rPr>
+              <a:t>Rishab CV</a:t>
+            </a:r>
+            <a:pPr indent="0" marL="0">
+              <a:buNone/>
+            </a:pPr>
+            <a:r>
+              <a:rPr lang="en-US" sz="1500" dirty="0">
+                <a:solidFill>
+                  <a:srgbClr val="FFB347"/>
+                </a:solidFill>
+              </a:rPr>
+              <a:t>   24BCE5296</a:t>
+            </a:r>
+            <a:endParaRPr lang="en-US" sz="1500" dirty="0"/>
+          </a:p>
+        </p:txBody>
+      </p:sp>
+      <p:sp>
+        <p:nvSpPr>
+          <p:cNvPr id="6" name="Text 4"/>
+          <p:cNvSpPr txBox="1"/>
+          <p:nvPr/>
+        </p:nvSpPr>
+        <p:spPr>
+          <a:xfrm>
+            <a:off x="960120" y="5788152"/>
+            <a:ext cx="5486400" cy="365760"/>
+          </a:xfrm>
+          <a:prstGeom prst="rect">
+            <a:avLst/>
+          </a:prstGeom>
+          <a:noFill/>
+          <a:ln/>
+        </p:spPr>
+        <p:txBody>
+          <a:bodyPr wrap="square" lIns="0" tIns="0" rIns="0" bIns="0" rtlCol="0" anchor="ctr"/>
+          <a:lstStyle/>
+          <a:p>
+            <a:pPr indent="0" marL="0">
+              <a:buNone/>
+            </a:pPr>
+            <a:r>
+              <a:rPr lang="en-US" sz="1500" b="1" dirty="0">
+                <a:solidFill>
+                  <a:srgbClr val="FFFFFF"/>
+                </a:solidFill>
+              </a:rPr>
+              <a:t>Martin Wills</a:t>
+            </a:r>
+            <a:pPr indent="0" marL="0">
+              <a:buNone/>
+            </a:pPr>
+            <a:r>
+              <a:rPr lang="en-US" sz="1500" dirty="0">
+                <a:solidFill>
+                  <a:srgbClr val="FFB347"/>
+                </a:solidFill>
+              </a:rPr>
+              <a:t>   24BCE5255</a:t>
+            </a:r>
+            <a:endParaRPr lang="en-US" sz="1500" dirty="0"/>
+          </a:p>
+        </p:txBody>
+      </p:sp>
+      <p:sp>
+        <p:nvSpPr>
+          <p:cNvPr id="7" name="signal housing"/>
           <p:cNvSpPr/>
           <p:nvPr/>
         </p:nvSpPr>
@@ -4074,7 +4195,7 @@
       </p:sp>
       <p:sp>
         <p:nvSpPr>
-          <p:cNvPr id="5" name="lamp 0"/>
+          <p:cNvPr id="8" name="lamp 0"/>
           <p:cNvSpPr/>
           <p:nvPr/>
         </p:nvSpPr>
@@ -4099,7 +4220,7 @@
       </p:sp>
       <p:sp>
         <p:nvSpPr>
-          <p:cNvPr id="6" name="lamp 1"/>
+          <p:cNvPr id="9" name="lamp 1"/>
           <p:cNvSpPr/>
           <p:nvPr/>
         </p:nvSpPr>
@@ -4124,7 +4245,7 @@
       </p:sp>
       <p:sp>
         <p:nvSpPr>
-          <p:cNvPr id="7" name="lamp 2"/>
+          <p:cNvPr id="10" name="lamp 2"/>
           <p:cNvSpPr/>
           <p:nvPr/>
         </p:nvSpPr>

--- a/docs/deck/SmartTraffic-SIH-PS90.pptx
+++ b/docs/deck/SmartTraffic-SIH-PS90.pptx
@@ -4273,6 +4273,18 @@
   <p:clrMapOvr>
     <a:masterClrMapping/>
   </p:clrMapOvr>
+  <mc:AlternateContent xmlns:mc="http://schemas.openxmlformats.org/markup-compatibility/2006">
+    <mc:Choice xmlns:p14="http://schemas.microsoft.com/office/powerpoint/2010/main" Requires="p14">
+      <p:transition spd="slow" p14:dur="700">
+        <p14:push dir="u"/>
+      </p:transition>
+    </mc:Choice>
+    <mc:Fallback>
+      <p:transition spd="slow">
+        <p:push dir="u"/>
+      </p:transition>
+    </mc:Fallback>
+  </mc:AlternateContent>
 </p:sld>
 </file>
 
@@ -4823,6 +4835,18 @@
   <p:clrMapOvr>
     <a:masterClrMapping/>
   </p:clrMapOvr>
+  <mc:AlternateContent xmlns:mc="http://schemas.openxmlformats.org/markup-compatibility/2006">
+    <mc:Choice xmlns:p14="http://schemas.microsoft.com/office/powerpoint/2010/main" Requires="p14">
+      <p:transition spd="slow" p14:dur="700">
+        <p14:fade/>
+      </p:transition>
+    </mc:Choice>
+    <mc:Fallback>
+      <p:transition spd="slow">
+        <p:fade/>
+      </p:transition>
+    </mc:Fallback>
+  </mc:AlternateContent>
 </p:sld>
 </file>
 
@@ -5427,6 +5451,18 @@
   <p:clrMapOvr>
     <a:masterClrMapping/>
   </p:clrMapOvr>
+  <mc:AlternateContent xmlns:mc="http://schemas.openxmlformats.org/markup-compatibility/2006">
+    <mc:Choice xmlns:p14="http://schemas.microsoft.com/office/powerpoint/2010/main" Requires="p14">
+      <p:transition spd="slow" p14:dur="700">
+        <p14:fade/>
+      </p:transition>
+    </mc:Choice>
+    <mc:Fallback>
+      <p:transition spd="slow">
+        <p:fade/>
+      </p:transition>
+    </mc:Fallback>
+  </mc:AlternateContent>
 </p:sld>
 </file>
 
@@ -5952,6 +5988,18 @@
   <p:clrMapOvr>
     <a:masterClrMapping/>
   </p:clrMapOvr>
+  <mc:AlternateContent xmlns:mc="http://schemas.openxmlformats.org/markup-compatibility/2006">
+    <mc:Choice xmlns:p14="http://schemas.microsoft.com/office/powerpoint/2010/main" Requires="p14">
+      <p:transition spd="slow" p14:dur="700">
+        <p14:fade/>
+      </p:transition>
+    </mc:Choice>
+    <mc:Fallback>
+      <p:transition spd="slow">
+        <p:fade/>
+      </p:transition>
+    </mc:Fallback>
+  </mc:AlternateContent>
 </p:sld>
 </file>
 
@@ -6456,6 +6504,18 @@
   <p:clrMapOvr>
     <a:masterClrMapping/>
   </p:clrMapOvr>
+  <mc:AlternateContent xmlns:mc="http://schemas.openxmlformats.org/markup-compatibility/2006">
+    <mc:Choice xmlns:p14="http://schemas.microsoft.com/office/powerpoint/2010/main" Requires="p14">
+      <p:transition spd="slow" p14:dur="700">
+        <p14:fade/>
+      </p:transition>
+    </mc:Choice>
+    <mc:Fallback>
+      <p:transition spd="slow">
+        <p:fade/>
+      </p:transition>
+    </mc:Fallback>
+  </mc:AlternateContent>
 </p:sld>
 </file>
 
@@ -6673,6 +6733,18 @@
   <p:clrMapOvr>
     <a:masterClrMapping/>
   </p:clrMapOvr>
+  <mc:AlternateContent xmlns:mc="http://schemas.openxmlformats.org/markup-compatibility/2006">
+    <mc:Choice xmlns:p14="http://schemas.microsoft.com/office/powerpoint/2010/main" Requires="p14">
+      <p:transition spd="slow" p14:dur="700">
+        <p14:push dir="u"/>
+      </p:transition>
+    </mc:Choice>
+    <mc:Fallback>
+      <p:transition spd="slow">
+        <p:push dir="u"/>
+      </p:transition>
+    </mc:Fallback>
+  </mc:AlternateContent>
 </p:sld>
 </file>
 
@@ -7204,6 +7276,18 @@
   <p:clrMapOvr>
     <a:masterClrMapping/>
   </p:clrMapOvr>
+  <mc:AlternateContent xmlns:mc="http://schemas.openxmlformats.org/markup-compatibility/2006">
+    <mc:Choice xmlns:p14="http://schemas.microsoft.com/office/powerpoint/2010/main" Requires="p14">
+      <p:transition spd="slow" p14:dur="700">
+        <p14:fade/>
+      </p:transition>
+    </mc:Choice>
+    <mc:Fallback>
+      <p:transition spd="slow">
+        <p:fade/>
+      </p:transition>
+    </mc:Fallback>
+  </mc:AlternateContent>
 </p:sld>
 </file>
 
@@ -7644,6 +7728,18 @@
   <p:clrMapOvr>
     <a:masterClrMapping/>
   </p:clrMapOvr>
+  <mc:AlternateContent xmlns:mc="http://schemas.openxmlformats.org/markup-compatibility/2006">
+    <mc:Choice xmlns:p14="http://schemas.microsoft.com/office/powerpoint/2010/main" Requires="p14">
+      <p:transition spd="slow" p14:dur="700">
+        <p14:fade/>
+      </p:transition>
+    </mc:Choice>
+    <mc:Fallback>
+      <p:transition spd="slow">
+        <p:fade/>
+      </p:transition>
+    </mc:Fallback>
+  </mc:AlternateContent>
 </p:sld>
 </file>
 
@@ -7745,6 +7841,18 @@
   <p:clrMapOvr>
     <a:masterClrMapping/>
   </p:clrMapOvr>
+  <mc:AlternateContent xmlns:mc="http://schemas.openxmlformats.org/markup-compatibility/2006">
+    <mc:Choice xmlns:p14="http://schemas.microsoft.com/office/powerpoint/2010/main" Requires="p14">
+      <p:transition spd="slow" p14:dur="700">
+        <p14:fade/>
+      </p:transition>
+    </mc:Choice>
+    <mc:Fallback>
+      <p:transition spd="slow">
+        <p:fade/>
+      </p:transition>
+    </mc:Fallback>
+  </mc:AlternateContent>
 </p:sld>
 </file>
 
@@ -8024,6 +8132,18 @@
   <p:clrMapOvr>
     <a:masterClrMapping/>
   </p:clrMapOvr>
+  <mc:AlternateContent xmlns:mc="http://schemas.openxmlformats.org/markup-compatibility/2006">
+    <mc:Choice xmlns:p14="http://schemas.microsoft.com/office/powerpoint/2010/main" Requires="p14">
+      <p:transition spd="slow" p14:dur="700">
+        <p14:fade/>
+      </p:transition>
+    </mc:Choice>
+    <mc:Fallback>
+      <p:transition spd="slow">
+        <p:fade/>
+      </p:transition>
+    </mc:Fallback>
+  </mc:AlternateContent>
 </p:sld>
 </file>
 
@@ -8319,6 +8439,18 @@
   <p:clrMapOvr>
     <a:masterClrMapping/>
   </p:clrMapOvr>
+  <mc:AlternateContent xmlns:mc="http://schemas.openxmlformats.org/markup-compatibility/2006">
+    <mc:Choice xmlns:p14="http://schemas.microsoft.com/office/powerpoint/2010/main" Requires="p14">
+      <p:transition spd="slow" p14:dur="700">
+        <p14:fade/>
+      </p:transition>
+    </mc:Choice>
+    <mc:Fallback>
+      <p:transition spd="slow">
+        <p:fade/>
+      </p:transition>
+    </mc:Fallback>
+  </mc:AlternateContent>
 </p:sld>
 </file>
 
@@ -9067,6 +9199,18 @@
   <p:clrMapOvr>
     <a:masterClrMapping/>
   </p:clrMapOvr>
+  <mc:AlternateContent xmlns:mc="http://schemas.openxmlformats.org/markup-compatibility/2006">
+    <mc:Choice xmlns:p14="http://schemas.microsoft.com/office/powerpoint/2010/main" Requires="p14">
+      <p:transition spd="slow" p14:dur="700">
+        <p14:fade/>
+      </p:transition>
+    </mc:Choice>
+    <mc:Fallback>
+      <p:transition spd="slow">
+        <p:fade/>
+      </p:transition>
+    </mc:Fallback>
+  </mc:AlternateContent>
 </p:sld>
 </file>
 
@@ -9243,6 +9387,18 @@
   <p:clrMapOvr>
     <a:masterClrMapping/>
   </p:clrMapOvr>
+  <mc:AlternateContent xmlns:mc="http://schemas.openxmlformats.org/markup-compatibility/2006">
+    <mc:Choice xmlns:p14="http://schemas.microsoft.com/office/powerpoint/2010/main" Requires="p14">
+      <p:transition spd="slow" p14:dur="700">
+        <p14:fade/>
+      </p:transition>
+    </mc:Choice>
+    <mc:Fallback>
+      <p:transition spd="slow">
+        <p:fade/>
+      </p:transition>
+    </mc:Fallback>
+  </mc:AlternateContent>
 </p:sld>
 </file>
 
@@ -9609,6 +9765,18 @@
   <p:clrMapOvr>
     <a:masterClrMapping/>
   </p:clrMapOvr>
+  <mc:AlternateContent xmlns:mc="http://schemas.openxmlformats.org/markup-compatibility/2006">
+    <mc:Choice xmlns:p14="http://schemas.microsoft.com/office/powerpoint/2010/main" Requires="p14">
+      <p:transition spd="slow" p14:dur="700">
+        <p14:fade/>
+      </p:transition>
+    </mc:Choice>
+    <mc:Fallback>
+      <p:transition spd="slow">
+        <p:fade/>
+      </p:transition>
+    </mc:Fallback>
+  </mc:AlternateContent>
 </p:sld>
 </file>
 
